--- a/assets/figures-editable/c1-c2/c2-e22.pptx
+++ b/assets/figures-editable/c1-c2/c2-e22.pptx
@@ -7,7 +7,7 @@
   <p:sldIdLst>
     <p:sldId id="256" r:id="rId7"/>
   </p:sldIdLst>
-  <p:sldSz cx="11948160" cy="8095488" type="screen4x3"/>
+  <p:sldSz cx="12191695" cy="6858000" type="screen4x3"/>
   <p:notesSz cx="6858000" cy="9144000"/>
   <p:defaultTextStyle>
     <a:defPPr>
@@ -3098,14 +3098,14 @@
       <p:grpSpPr/>
       <p:sp>
         <p:nvSpPr>
-          <p:cNvPr id="2" name="text1" descr="sci-ppt:C2-E22-001"/>
+          <p:cNvPr id="2" name="C2-E22 text 0" descr="sci-ppt:o000"/>
           <p:cNvSpPr txBox="1"/>
           <p:nvPr/>
         </p:nvSpPr>
         <p:spPr>
           <a:xfrm>
-            <a:off x="316992" y="268224"/>
-            <a:ext cx="11277600" cy="359054"/>
+            <a:off x="274320" y="118872"/>
+            <a:ext cx="11612880" cy="340105"/>
           </a:xfrm>
           <a:prstGeom prst="rect">
             <a:avLst/>
@@ -3114,7 +3114,7 @@
           <a:effectLst/>
         </p:spPr>
         <p:txBody>
-          <a:bodyPr wrap="none" lIns="27432" rIns="27432" tIns="18288" bIns="18288" anchor="ctr">
+          <a:bodyPr wrap="none" lIns="18288" rIns="18288" tIns="18288" bIns="18288" anchor="t">
             <a:spAutoFit/>
           </a:bodyPr>
           <a:lstStyle/>
@@ -3125,37 +3125,37 @@
               </a:spcAft>
             </a:pPr>
             <a:r>
-              <a:rPr sz="1823" b="0" i="0">
+              <a:rPr sz="1900" b="1" i="0">
                 <a:solidFill>
                   <a:srgbClr val="8EDBD4"/>
                 </a:solidFill>
                 <a:latin typeface="Arial"/>
               </a:rPr>
-              <a:t>C2-E22 | Physical-variable diagram</a:t>
-            </a:r>
-          </a:p>
-        </p:txBody>
-      </p:sp>
-      <p:sp>
-        <p:nvSpPr>
-          <p:cNvPr id="3" name="rect2" descr="sci-ppt:C2-E22-002"/>
+              <a:t>C2-E22 · Uniform-state open-bubble first-law model</a:t>
+            </a:r>
+          </a:p>
+        </p:txBody>
+      </p:sp>
+      <p:sp>
+        <p:nvSpPr>
+          <p:cNvPr id="3" name="C2-E22 round_rect 1" descr="sci-ppt:o001"/>
           <p:cNvSpPr/>
           <p:nvPr/>
         </p:nvSpPr>
         <p:spPr>
           <a:xfrm>
-            <a:off x="4023360" y="1950720"/>
-            <a:ext cx="3657600" cy="1341120"/>
-          </a:xfrm>
-          <a:prstGeom prst="rect">
+            <a:off x="365760" y="914400"/>
+            <a:ext cx="5852160" cy="4937760"/>
+          </a:xfrm>
+          <a:prstGeom prst="roundRect">
             <a:avLst/>
           </a:prstGeom>
           <a:solidFill>
             <a:srgbClr val="213E4B"/>
           </a:solidFill>
-          <a:ln w="19050">
+          <a:ln w="20320">
             <a:solidFill>
-              <a:srgbClr val="B4C7D2"/>
+              <a:srgbClr val="8EDBD4"/>
             </a:solidFill>
           </a:ln>
           <a:effectLst/>
@@ -3170,14 +3170,14 @@
       </p:sp>
       <p:sp>
         <p:nvSpPr>
-          <p:cNvPr id="4" name="text3" descr="sci-ppt:C2-E22-003"/>
+          <p:cNvPr id="4" name="C2-E22 text 2" descr="sci-ppt:o002"/>
           <p:cNvSpPr txBox="1"/>
           <p:nvPr/>
         </p:nvSpPr>
         <p:spPr>
           <a:xfrm>
-            <a:off x="4145280" y="2072640"/>
-            <a:ext cx="3474720" cy="340156"/>
+            <a:off x="475488" y="969264"/>
+            <a:ext cx="5632704" cy="254889"/>
           </a:xfrm>
           <a:prstGeom prst="rect">
             <a:avLst/>
@@ -3186,7 +3186,7 @@
           <a:effectLst/>
         </p:spPr>
         <p:txBody>
-          <a:bodyPr wrap="none" lIns="27432" rIns="27432" tIns="18288" bIns="18288" anchor="ctr">
+          <a:bodyPr wrap="none" lIns="18288" rIns="18288" tIns="18288" bIns="18288" anchor="t">
             <a:spAutoFit/>
           </a:bodyPr>
           <a:lstStyle/>
@@ -3197,32 +3197,200 @@
               </a:spcAft>
             </a:pPr>
             <a:r>
-              <a:rPr sz="1728" b="0" i="0">
+              <a:rPr sz="1350" b="1" i="0">
+                <a:solidFill>
+                  <a:srgbClr val="8EDBD4"/>
+                </a:solidFill>
+                <a:latin typeface="Arial"/>
+              </a:rPr>
+              <a:t>Open bubble as a control volume</a:t>
+            </a:r>
+          </a:p>
+        </p:txBody>
+      </p:sp>
+      <p:sp>
+        <p:nvSpPr>
+          <p:cNvPr id="5" name="C2-E22 ellipse 3" descr="sci-ppt:o003"/>
+          <p:cNvSpPr/>
+          <p:nvPr/>
+        </p:nvSpPr>
+        <p:spPr>
+          <a:xfrm>
+            <a:off x="2011680" y="2286000"/>
+            <a:ext cx="2194560" cy="2194560"/>
+          </a:xfrm>
+          <a:prstGeom prst="ellipse">
+            <a:avLst/>
+          </a:prstGeom>
+          <a:solidFill>
+            <a:srgbClr val="0C1820"/>
+          </a:solidFill>
+          <a:ln w="33020">
+            <a:solidFill>
+              <a:srgbClr val="F2B880"/>
+            </a:solidFill>
+          </a:ln>
+          <a:effectLst/>
+        </p:spPr>
+        <p:txBody>
+          <a:bodyPr rtlCol="0" anchor="ctr"/>
+          <a:lstStyle/>
+          <a:p>
+            <a:pPr algn="ctr"/>
+          </a:p>
+        </p:txBody>
+      </p:sp>
+      <p:sp>
+        <p:nvSpPr>
+          <p:cNvPr id="6" name="C2-E22 text 4" descr="sci-ppt:o004"/>
+          <p:cNvSpPr txBox="1"/>
+          <p:nvPr/>
+        </p:nvSpPr>
+        <p:spPr>
+          <a:xfrm>
+            <a:off x="2377439" y="3108960"/>
+            <a:ext cx="1463040" cy="433070"/>
+          </a:xfrm>
+          <a:prstGeom prst="rect">
+            <a:avLst/>
+          </a:prstGeom>
+          <a:noFill/>
+          <a:effectLst/>
+        </p:spPr>
+        <p:txBody>
+          <a:bodyPr wrap="none" lIns="18288" rIns="18288" tIns="18288" bIns="18288" anchor="t">
+            <a:spAutoFit/>
+          </a:bodyPr>
+          <a:lstStyle/>
+          <a:p>
+            <a:pPr algn="ctr">
+              <a:spcAft>
+                <a:spcPts val="0"/>
+              </a:spcAft>
+            </a:pPr>
+            <a:r>
+              <a:rPr sz="1250" b="1" i="0">
                 <a:solidFill>
                   <a:srgbClr val="E7F0F3"/>
                 </a:solidFill>
                 <a:latin typeface="Arial"/>
               </a:rPr>
-              <a:t>Bubble energy storage U_b</a:t>
+              <a:t>U_b</a:t>
+            </a:r>
+          </a:p>
+          <a:p>
+            <a:pPr algn="ctr">
+              <a:spcAft>
+                <a:spcPts val="0"/>
+              </a:spcAft>
+            </a:pPr>
+            <a:r>
+              <a:rPr sz="1250" b="1" i="0">
+                <a:solidFill>
+                  <a:srgbClr val="E7F0F3"/>
+                </a:solidFill>
+                <a:latin typeface="Arial"/>
+              </a:rPr>
+              <a:t>uniform T_b, p_b</a:t>
             </a:r>
           </a:p>
         </p:txBody>
       </p:sp>
       <p:cxnSp>
         <p:nvCxnSpPr>
-          <p:cNvPr id="5" name="arrow4" descr="sci-ppt:C2-E22-004"/>
+          <p:cNvPr id="7" name="C2-E22 arrow 5" descr="sci-ppt:o005"/>
           <p:cNvCxnSpPr/>
           <p:nvPr/>
         </p:nvCxnSpPr>
         <p:spPr>
           <a:xfrm>
-            <a:off x="1219200" y="2560320"/>
-            <a:ext cx="2682240" cy="0"/>
+            <a:off x="457200" y="3383280"/>
+            <a:ext cx="1508760" cy="0"/>
           </a:xfrm>
           <a:prstGeom prst="line">
             <a:avLst/>
           </a:prstGeom>
-          <a:ln w="25400">
+          <a:ln w="50800">
+            <a:solidFill>
+              <a:srgbClr val="F28BA0"/>
+            </a:solidFill>
+            <a:headEnd type="none" w="med" len="med"/>
+            <a:tailEnd type="triangle" w="med" len="med"/>
+          </a:ln>
+          <a:effectLst/>
+        </p:spPr>
+      </p:cxnSp>
+      <p:sp>
+        <p:nvSpPr>
+          <p:cNvPr id="8" name="C2-E22 text 6" descr="sci-ppt:o006"/>
+          <p:cNvSpPr txBox="1"/>
+          <p:nvPr/>
+        </p:nvSpPr>
+        <p:spPr>
+          <a:xfrm>
+            <a:off x="502920" y="2788920"/>
+            <a:ext cx="1737360" cy="417576"/>
+          </a:xfrm>
+          <a:prstGeom prst="rect">
+            <a:avLst/>
+          </a:prstGeom>
+          <a:noFill/>
+          <a:effectLst/>
+        </p:spPr>
+        <p:txBody>
+          <a:bodyPr wrap="none" lIns="18288" rIns="18288" tIns="18288" bIns="18288" anchor="t">
+            <a:spAutoFit/>
+          </a:bodyPr>
+          <a:lstStyle/>
+          <a:p>
+            <a:pPr algn="l">
+              <a:spcAft>
+                <a:spcPts val="0"/>
+              </a:spcAft>
+            </a:pPr>
+            <a:r>
+              <a:rPr sz="1200" b="1" i="0">
+                <a:solidFill>
+                  <a:srgbClr val="F28BA0"/>
+                </a:solidFill>
+                <a:latin typeface="Arial"/>
+              </a:rPr>
+              <a:t>heat in Q̇_b</a:t>
+            </a:r>
+          </a:p>
+          <a:p>
+            <a:pPr algn="l">
+              <a:spcAft>
+                <a:spcPts val="0"/>
+              </a:spcAft>
+            </a:pPr>
+            <a:r>
+              <a:rPr sz="1200" b="1" i="0">
+                <a:solidFill>
+                  <a:srgbClr val="F28BA0"/>
+                </a:solidFill>
+                <a:latin typeface="Arial"/>
+              </a:rPr>
+              <a:t>(conduction)</a:t>
+            </a:r>
+          </a:p>
+        </p:txBody>
+      </p:sp>
+      <p:cxnSp>
+        <p:nvCxnSpPr>
+          <p:cNvPr id="9" name="C2-E22 arrow 7" descr="sci-ppt:o007"/>
+          <p:cNvCxnSpPr/>
+          <p:nvPr/>
+        </p:nvCxnSpPr>
+        <p:spPr>
+          <a:xfrm>
+            <a:off x="2194560" y="1554480"/>
+            <a:ext cx="365760" cy="713232"/>
+          </a:xfrm>
+          <a:prstGeom prst="line">
+            <a:avLst/>
+          </a:prstGeom>
+          <a:ln w="50800">
             <a:solidFill>
               <a:srgbClr val="8EDBD4"/>
             </a:solidFill>
@@ -3234,14 +3402,14 @@
       </p:cxnSp>
       <p:sp>
         <p:nvSpPr>
-          <p:cNvPr id="6" name="text5" descr="sci-ppt:C2-E22-005"/>
+          <p:cNvPr id="10" name="C2-E22 text 8" descr="sci-ppt:o008"/>
           <p:cNvSpPr txBox="1"/>
           <p:nvPr/>
         </p:nvSpPr>
         <p:spPr>
           <a:xfrm>
-            <a:off x="1097280" y="1524000"/>
-            <a:ext cx="2804160" cy="359054"/>
+            <a:off x="822959" y="1188720"/>
+            <a:ext cx="2560320" cy="231648"/>
           </a:xfrm>
           <a:prstGeom prst="rect">
             <a:avLst/>
@@ -3250,7 +3418,7 @@
           <a:effectLst/>
         </p:spPr>
         <p:txBody>
-          <a:bodyPr wrap="none" lIns="27432" rIns="27432" tIns="18288" bIns="18288" anchor="ctr">
+          <a:bodyPr wrap="none" lIns="18288" rIns="18288" tIns="18288" bIns="18288" anchor="t">
             <a:spAutoFit/>
           </a:bodyPr>
           <a:lstStyle/>
@@ -3261,51 +3429,627 @@
               </a:spcAft>
             </a:pPr>
             <a:r>
-              <a:rPr sz="1823" b="0" i="0">
+              <a:rPr sz="1200" b="1" i="0">
+                <a:solidFill>
+                  <a:srgbClr val="8EDBD4"/>
+                </a:solidFill>
+                <a:latin typeface="Arial"/>
+              </a:rPr>
+              <a:t>vapor in:  Σ hᵥ,s ṁᵥ,s</a:t>
+            </a:r>
+          </a:p>
+        </p:txBody>
+      </p:sp>
+      <p:cxnSp>
+        <p:nvCxnSpPr>
+          <p:cNvPr id="11" name="C2-E22 arrow 9" descr="sci-ppt:o009"/>
+          <p:cNvCxnSpPr/>
+          <p:nvPr/>
+        </p:nvCxnSpPr>
+        <p:spPr>
+          <a:xfrm flipV="1">
+            <a:off x="3984548" y="2119585"/>
+            <a:ext cx="630424" cy="528988"/>
+          </a:xfrm>
+          <a:prstGeom prst="line">
+            <a:avLst/>
+          </a:prstGeom>
+          <a:ln w="50800">
+            <a:solidFill>
+              <a:srgbClr val="F2B880"/>
+            </a:solidFill>
+            <a:headEnd type="none" w="med" len="med"/>
+            <a:tailEnd type="triangle" w="med" len="med"/>
+          </a:ln>
+          <a:effectLst/>
+        </p:spPr>
+      </p:cxnSp>
+      <p:sp>
+        <p:nvSpPr>
+          <p:cNvPr id="12" name="C2-E22 text 10" descr="sci-ppt:o010"/>
+          <p:cNvSpPr txBox="1"/>
+          <p:nvPr/>
+        </p:nvSpPr>
+        <p:spPr>
+          <a:xfrm>
+            <a:off x="4297680" y="1234440"/>
+            <a:ext cx="2377440" cy="231648"/>
+          </a:xfrm>
+          <a:prstGeom prst="rect">
+            <a:avLst/>
+          </a:prstGeom>
+          <a:noFill/>
+          <a:effectLst/>
+        </p:spPr>
+        <p:txBody>
+          <a:bodyPr wrap="none" lIns="18288" rIns="18288" tIns="18288" bIns="18288" anchor="t">
+            <a:spAutoFit/>
+          </a:bodyPr>
+          <a:lstStyle/>
+          <a:p>
+            <a:pPr algn="l">
+              <a:spcAft>
+                <a:spcPts val="0"/>
+              </a:spcAft>
+            </a:pPr>
+            <a:r>
+              <a:rPr sz="1200" b="1" i="0">
+                <a:solidFill>
+                  <a:srgbClr val="F2B880"/>
+                </a:solidFill>
+                <a:latin typeface="Arial"/>
+              </a:rPr>
+              <a:t>work out: p_b V̇_b</a:t>
+            </a:r>
+          </a:p>
+        </p:txBody>
+      </p:sp>
+      <p:sp>
+        <p:nvSpPr>
+          <p:cNvPr id="13" name="C2-E22 text 11" descr="sci-ppt:o011"/>
+          <p:cNvSpPr txBox="1"/>
+          <p:nvPr/>
+        </p:nvSpPr>
+        <p:spPr>
+          <a:xfrm>
+            <a:off x="502920" y="5212080"/>
+            <a:ext cx="5486400" cy="231648"/>
+          </a:xfrm>
+          <a:prstGeom prst="rect">
+            <a:avLst/>
+          </a:prstGeom>
+          <a:noFill/>
+          <a:effectLst/>
+        </p:spPr>
+        <p:txBody>
+          <a:bodyPr wrap="none" lIns="18288" rIns="18288" tIns="18288" bIns="18288" anchor="t">
+            <a:spAutoFit/>
+          </a:bodyPr>
+          <a:lstStyle/>
+          <a:p>
+            <a:pPr algn="l">
+              <a:spcAft>
+                <a:spcPts val="0"/>
+              </a:spcAft>
+            </a:pPr>
+            <a:r>
+              <a:rPr sz="1200" b="0" i="0">
+                <a:solidFill>
+                  <a:srgbClr val="B4C7D2"/>
+                </a:solidFill>
+                <a:latin typeface="Arial"/>
+              </a:rPr>
+              <a:t>V_b = (4π/3)R³, V̇_b = 4πR²Ṙ</a:t>
+            </a:r>
+          </a:p>
+        </p:txBody>
+      </p:sp>
+      <p:sp>
+        <p:nvSpPr>
+          <p:cNvPr id="14" name="C2-E22 text 12" descr="sci-ppt:o012"/>
+          <p:cNvSpPr txBox="1"/>
+          <p:nvPr/>
+        </p:nvSpPr>
+        <p:spPr>
+          <a:xfrm>
+            <a:off x="6492240" y="960120"/>
+            <a:ext cx="5303520" cy="254889"/>
+          </a:xfrm>
+          <a:prstGeom prst="rect">
+            <a:avLst/>
+          </a:prstGeom>
+          <a:noFill/>
+          <a:effectLst/>
+        </p:spPr>
+        <p:txBody>
+          <a:bodyPr wrap="none" lIns="18288" rIns="18288" tIns="18288" bIns="18288" anchor="t">
+            <a:spAutoFit/>
+          </a:bodyPr>
+          <a:lstStyle/>
+          <a:p>
+            <a:pPr algn="l">
+              <a:spcAft>
+                <a:spcPts val="0"/>
+              </a:spcAft>
+            </a:pPr>
+            <a:r>
+              <a:rPr sz="1350" b="1" i="0">
+                <a:solidFill>
+                  <a:srgbClr val="8EDBD4"/>
+                </a:solidFill>
+                <a:latin typeface="Arial"/>
+              </a:rPr>
+              <a:t>Power ledger (illustrative values, W)</a:t>
+            </a:r>
+          </a:p>
+        </p:txBody>
+      </p:sp>
+      <p:cxnSp>
+        <p:nvCxnSpPr>
+          <p:cNvPr id="15" name="C2-E22 line 13" descr="sci-ppt:o013"/>
+          <p:cNvCxnSpPr/>
+          <p:nvPr/>
+        </p:nvCxnSpPr>
+        <p:spPr>
+          <a:xfrm>
+            <a:off x="6583680" y="4663440"/>
+            <a:ext cx="5120640" cy="0"/>
+          </a:xfrm>
+          <a:prstGeom prst="line">
+            <a:avLst/>
+          </a:prstGeom>
+          <a:ln w="19050">
+            <a:solidFill>
+              <a:srgbClr val="B4C7D2"/>
+            </a:solidFill>
+          </a:ln>
+          <a:effectLst/>
+        </p:spPr>
+      </p:cxnSp>
+      <p:cxnSp>
+        <p:nvCxnSpPr>
+          <p:cNvPr id="16" name="C2-E22 line 14" descr="sci-ppt:o014"/>
+          <p:cNvCxnSpPr/>
+          <p:nvPr/>
+        </p:nvCxnSpPr>
+        <p:spPr>
+          <a:xfrm>
+            <a:off x="6583680" y="1554480"/>
+            <a:ext cx="0" cy="3108960"/>
+          </a:xfrm>
+          <a:prstGeom prst="line">
+            <a:avLst/>
+          </a:prstGeom>
+          <a:ln w="19050">
+            <a:solidFill>
+              <a:srgbClr val="B4C7D2"/>
+            </a:solidFill>
+          </a:ln>
+          <a:effectLst/>
+        </p:spPr>
+      </p:cxnSp>
+      <p:cxnSp>
+        <p:nvCxnSpPr>
+          <p:cNvPr id="17" name="C2-E22 line 15" descr="sci-ppt:o015"/>
+          <p:cNvCxnSpPr/>
+          <p:nvPr/>
+        </p:nvCxnSpPr>
+        <p:spPr>
+          <a:xfrm>
+            <a:off x="6519672" y="4663440"/>
+            <a:ext cx="64008" cy="0"/>
+          </a:xfrm>
+          <a:prstGeom prst="line">
+            <a:avLst/>
+          </a:prstGeom>
+          <a:ln w="12700">
+            <a:solidFill>
+              <a:srgbClr val="B4C7D2"/>
+            </a:solidFill>
+          </a:ln>
+          <a:effectLst/>
+        </p:spPr>
+      </p:cxnSp>
+      <p:cxnSp>
+        <p:nvCxnSpPr>
+          <p:cNvPr id="18" name="C2-E22 line 16" descr="sci-ppt:o016"/>
+          <p:cNvCxnSpPr/>
+          <p:nvPr/>
+        </p:nvCxnSpPr>
+        <p:spPr>
+          <a:xfrm>
+            <a:off x="6583680" y="4663440"/>
+            <a:ext cx="5120640" cy="0"/>
+          </a:xfrm>
+          <a:prstGeom prst="line">
+            <a:avLst/>
+          </a:prstGeom>
+          <a:ln w="7620">
+            <a:solidFill>
+              <a:srgbClr val="2E4756"/>
+            </a:solidFill>
+          </a:ln>
+          <a:effectLst/>
+        </p:spPr>
+      </p:cxnSp>
+      <p:sp>
+        <p:nvSpPr>
+          <p:cNvPr id="19" name="C2-E22 text 17" descr="sci-ppt:o017"/>
+          <p:cNvSpPr txBox="1"/>
+          <p:nvPr/>
+        </p:nvSpPr>
+        <p:spPr>
+          <a:xfrm>
+            <a:off x="5715000" y="4581144"/>
+            <a:ext cx="777240" cy="208407"/>
+          </a:xfrm>
+          <a:prstGeom prst="rect">
+            <a:avLst/>
+          </a:prstGeom>
+          <a:noFill/>
+          <a:effectLst/>
+        </p:spPr>
+        <p:txBody>
+          <a:bodyPr wrap="none" lIns="18288" rIns="18288" tIns="18288" bIns="18288" anchor="t">
+            <a:spAutoFit/>
+          </a:bodyPr>
+          <a:lstStyle/>
+          <a:p>
+            <a:pPr algn="r">
+              <a:spcAft>
+                <a:spcPts val="0"/>
+              </a:spcAft>
+            </a:pPr>
+            <a:r>
+              <a:rPr sz="1050" b="0" i="0">
+                <a:solidFill>
+                  <a:srgbClr val="B4C7D2"/>
+                </a:solidFill>
+                <a:latin typeface="Arial"/>
+              </a:rPr>
+              <a:t>0</a:t>
+            </a:r>
+          </a:p>
+        </p:txBody>
+      </p:sp>
+      <p:cxnSp>
+        <p:nvCxnSpPr>
+          <p:cNvPr id="20" name="C2-E22 line 18" descr="sci-ppt:o018"/>
+          <p:cNvCxnSpPr/>
+          <p:nvPr/>
+        </p:nvCxnSpPr>
+        <p:spPr>
+          <a:xfrm>
+            <a:off x="6519672" y="3749039"/>
+            <a:ext cx="64008" cy="0"/>
+          </a:xfrm>
+          <a:prstGeom prst="line">
+            <a:avLst/>
+          </a:prstGeom>
+          <a:ln w="12700">
+            <a:solidFill>
+              <a:srgbClr val="B4C7D2"/>
+            </a:solidFill>
+          </a:ln>
+          <a:effectLst/>
+        </p:spPr>
+      </p:cxnSp>
+      <p:cxnSp>
+        <p:nvCxnSpPr>
+          <p:cNvPr id="21" name="C2-E22 line 19" descr="sci-ppt:o019"/>
+          <p:cNvCxnSpPr/>
+          <p:nvPr/>
+        </p:nvCxnSpPr>
+        <p:spPr>
+          <a:xfrm>
+            <a:off x="6583680" y="3749039"/>
+            <a:ext cx="5120640" cy="0"/>
+          </a:xfrm>
+          <a:prstGeom prst="line">
+            <a:avLst/>
+          </a:prstGeom>
+          <a:ln w="7620">
+            <a:solidFill>
+              <a:srgbClr val="2E4756"/>
+            </a:solidFill>
+          </a:ln>
+          <a:effectLst/>
+        </p:spPr>
+      </p:cxnSp>
+      <p:sp>
+        <p:nvSpPr>
+          <p:cNvPr id="22" name="C2-E22 text 20" descr="sci-ppt:o020"/>
+          <p:cNvSpPr txBox="1"/>
+          <p:nvPr/>
+        </p:nvSpPr>
+        <p:spPr>
+          <a:xfrm>
+            <a:off x="5715000" y="3666744"/>
+            <a:ext cx="777240" cy="208407"/>
+          </a:xfrm>
+          <a:prstGeom prst="rect">
+            <a:avLst/>
+          </a:prstGeom>
+          <a:noFill/>
+          <a:effectLst/>
+        </p:spPr>
+        <p:txBody>
+          <a:bodyPr wrap="none" lIns="18288" rIns="18288" tIns="18288" bIns="18288" anchor="t">
+            <a:spAutoFit/>
+          </a:bodyPr>
+          <a:lstStyle/>
+          <a:p>
+            <a:pPr algn="r">
+              <a:spcAft>
+                <a:spcPts val="0"/>
+              </a:spcAft>
+            </a:pPr>
+            <a:r>
+              <a:rPr sz="1050" b="0" i="0">
+                <a:solidFill>
+                  <a:srgbClr val="B4C7D2"/>
+                </a:solidFill>
+                <a:latin typeface="Arial"/>
+              </a:rPr>
+              <a:t>0.5</a:t>
+            </a:r>
+          </a:p>
+        </p:txBody>
+      </p:sp>
+      <p:cxnSp>
+        <p:nvCxnSpPr>
+          <p:cNvPr id="23" name="C2-E22 line 21" descr="sci-ppt:o021"/>
+          <p:cNvCxnSpPr/>
+          <p:nvPr/>
+        </p:nvCxnSpPr>
+        <p:spPr>
+          <a:xfrm>
+            <a:off x="6519672" y="2834639"/>
+            <a:ext cx="64008" cy="0"/>
+          </a:xfrm>
+          <a:prstGeom prst="line">
+            <a:avLst/>
+          </a:prstGeom>
+          <a:ln w="12700">
+            <a:solidFill>
+              <a:srgbClr val="B4C7D2"/>
+            </a:solidFill>
+          </a:ln>
+          <a:effectLst/>
+        </p:spPr>
+      </p:cxnSp>
+      <p:cxnSp>
+        <p:nvCxnSpPr>
+          <p:cNvPr id="24" name="C2-E22 line 22" descr="sci-ppt:o022"/>
+          <p:cNvCxnSpPr/>
+          <p:nvPr/>
+        </p:nvCxnSpPr>
+        <p:spPr>
+          <a:xfrm>
+            <a:off x="6583680" y="2834639"/>
+            <a:ext cx="5120640" cy="0"/>
+          </a:xfrm>
+          <a:prstGeom prst="line">
+            <a:avLst/>
+          </a:prstGeom>
+          <a:ln w="7620">
+            <a:solidFill>
+              <a:srgbClr val="2E4756"/>
+            </a:solidFill>
+          </a:ln>
+          <a:effectLst/>
+        </p:spPr>
+      </p:cxnSp>
+      <p:sp>
+        <p:nvSpPr>
+          <p:cNvPr id="25" name="C2-E22 text 23" descr="sci-ppt:o023"/>
+          <p:cNvSpPr txBox="1"/>
+          <p:nvPr/>
+        </p:nvSpPr>
+        <p:spPr>
+          <a:xfrm>
+            <a:off x="5715000" y="2752344"/>
+            <a:ext cx="777240" cy="208407"/>
+          </a:xfrm>
+          <a:prstGeom prst="rect">
+            <a:avLst/>
+          </a:prstGeom>
+          <a:noFill/>
+          <a:effectLst/>
+        </p:spPr>
+        <p:txBody>
+          <a:bodyPr wrap="none" lIns="18288" rIns="18288" tIns="18288" bIns="18288" anchor="t">
+            <a:spAutoFit/>
+          </a:bodyPr>
+          <a:lstStyle/>
+          <a:p>
+            <a:pPr algn="r">
+              <a:spcAft>
+                <a:spcPts val="0"/>
+              </a:spcAft>
+            </a:pPr>
+            <a:r>
+              <a:rPr sz="1050" b="0" i="0">
+                <a:solidFill>
+                  <a:srgbClr val="B4C7D2"/>
+                </a:solidFill>
+                <a:latin typeface="Arial"/>
+              </a:rPr>
+              <a:t>1</a:t>
+            </a:r>
+          </a:p>
+        </p:txBody>
+      </p:sp>
+      <p:cxnSp>
+        <p:nvCxnSpPr>
+          <p:cNvPr id="26" name="C2-E22 line 24" descr="sci-ppt:o024"/>
+          <p:cNvCxnSpPr/>
+          <p:nvPr/>
+        </p:nvCxnSpPr>
+        <p:spPr>
+          <a:xfrm>
+            <a:off x="6519672" y="1920239"/>
+            <a:ext cx="64008" cy="0"/>
+          </a:xfrm>
+          <a:prstGeom prst="line">
+            <a:avLst/>
+          </a:prstGeom>
+          <a:ln w="12700">
+            <a:solidFill>
+              <a:srgbClr val="B4C7D2"/>
+            </a:solidFill>
+          </a:ln>
+          <a:effectLst/>
+        </p:spPr>
+      </p:cxnSp>
+      <p:cxnSp>
+        <p:nvCxnSpPr>
+          <p:cNvPr id="27" name="C2-E22 line 25" descr="sci-ppt:o025"/>
+          <p:cNvCxnSpPr/>
+          <p:nvPr/>
+        </p:nvCxnSpPr>
+        <p:spPr>
+          <a:xfrm>
+            <a:off x="6583680" y="1920239"/>
+            <a:ext cx="5120640" cy="0"/>
+          </a:xfrm>
+          <a:prstGeom prst="line">
+            <a:avLst/>
+          </a:prstGeom>
+          <a:ln w="7620">
+            <a:solidFill>
+              <a:srgbClr val="2E4756"/>
+            </a:solidFill>
+          </a:ln>
+          <a:effectLst/>
+        </p:spPr>
+      </p:cxnSp>
+      <p:sp>
+        <p:nvSpPr>
+          <p:cNvPr id="28" name="C2-E22 text 26" descr="sci-ppt:o026"/>
+          <p:cNvSpPr txBox="1"/>
+          <p:nvPr/>
+        </p:nvSpPr>
+        <p:spPr>
+          <a:xfrm>
+            <a:off x="5715000" y="1837943"/>
+            <a:ext cx="777240" cy="208407"/>
+          </a:xfrm>
+          <a:prstGeom prst="rect">
+            <a:avLst/>
+          </a:prstGeom>
+          <a:noFill/>
+          <a:effectLst/>
+        </p:spPr>
+        <p:txBody>
+          <a:bodyPr wrap="none" lIns="18288" rIns="18288" tIns="18288" bIns="18288" anchor="t">
+            <a:spAutoFit/>
+          </a:bodyPr>
+          <a:lstStyle/>
+          <a:p>
+            <a:pPr algn="r">
+              <a:spcAft>
+                <a:spcPts val="0"/>
+              </a:spcAft>
+            </a:pPr>
+            <a:r>
+              <a:rPr sz="1050" b="0" i="0">
+                <a:solidFill>
+                  <a:srgbClr val="B4C7D2"/>
+                </a:solidFill>
+                <a:latin typeface="Arial"/>
+              </a:rPr>
+              <a:t>1.5</a:t>
+            </a:r>
+          </a:p>
+        </p:txBody>
+      </p:sp>
+      <p:sp>
+        <p:nvSpPr>
+          <p:cNvPr id="29" name="C2-E22 rect 27" descr="sci-ppt:o027"/>
+          <p:cNvSpPr/>
+          <p:nvPr/>
+        </p:nvSpPr>
+        <p:spPr>
+          <a:xfrm>
+            <a:off x="6762902" y="4114800"/>
+            <a:ext cx="921715" cy="548639"/>
+          </a:xfrm>
+          <a:prstGeom prst="rect">
+            <a:avLst/>
+          </a:prstGeom>
+          <a:solidFill>
+            <a:srgbClr val="F28BA0">
+              <a:alpha val="85000"/>
+            </a:srgbClr>
+          </a:solidFill>
+          <a:ln w="12700">
+            <a:solidFill>
+              <a:srgbClr val="F28BA0">
+                <a:alpha val="85000"/>
+              </a:srgbClr>
+            </a:solidFill>
+          </a:ln>
+          <a:effectLst/>
+        </p:spPr>
+        <p:txBody>
+          <a:bodyPr rtlCol="0" anchor="ctr"/>
+          <a:lstStyle/>
+          <a:p>
+            <a:pPr algn="ctr"/>
+          </a:p>
+        </p:txBody>
+      </p:sp>
+      <p:sp>
+        <p:nvSpPr>
+          <p:cNvPr id="30" name="C2-E22 text 28" descr="sci-ppt:o028"/>
+          <p:cNvSpPr txBox="1"/>
+          <p:nvPr/>
+        </p:nvSpPr>
+        <p:spPr>
+          <a:xfrm>
+            <a:off x="6534302" y="3840480"/>
+            <a:ext cx="1378915" cy="223900"/>
+          </a:xfrm>
+          <a:prstGeom prst="rect">
+            <a:avLst/>
+          </a:prstGeom>
+          <a:noFill/>
+          <a:effectLst/>
+        </p:spPr>
+        <p:txBody>
+          <a:bodyPr wrap="none" lIns="18288" rIns="18288" tIns="18288" bIns="18288" anchor="t">
+            <a:spAutoFit/>
+          </a:bodyPr>
+          <a:lstStyle/>
+          <a:p>
+            <a:pPr algn="ctr">
+              <a:spcAft>
+                <a:spcPts val="0"/>
+              </a:spcAft>
+            </a:pPr>
+            <a:r>
+              <a:rPr sz="1150" b="1" i="0">
                 <a:solidFill>
                   <a:srgbClr val="E7F0F3"/>
                 </a:solidFill>
                 <a:latin typeface="Arial"/>
               </a:rPr>
-              <a:t>Heat Q̇_b</a:t>
-            </a:r>
-          </a:p>
-        </p:txBody>
-      </p:sp>
-      <p:cxnSp>
-        <p:nvCxnSpPr>
-          <p:cNvPr id="7" name="arrow6" descr="sci-ppt:C2-E22-006"/>
-          <p:cNvCxnSpPr/>
-          <p:nvPr/>
-        </p:nvCxnSpPr>
-        <p:spPr>
-          <a:xfrm>
-            <a:off x="5852160" y="1219200"/>
-            <a:ext cx="0" cy="609600"/>
-          </a:xfrm>
-          <a:prstGeom prst="line">
-            <a:avLst/>
-          </a:prstGeom>
-          <a:ln w="25400">
-            <a:solidFill>
-              <a:srgbClr val="8EDBD4"/>
-            </a:solidFill>
-            <a:headEnd type="none" w="med" len="med"/>
-            <a:tailEnd type="triangle" w="med" len="med"/>
-          </a:ln>
-          <a:effectLst/>
-        </p:spPr>
-      </p:cxnSp>
-      <p:sp>
-        <p:nvSpPr>
-          <p:cNvPr id="8" name="text7" descr="sci-ppt:C2-E22-007"/>
+              <a:t>0.3</a:t>
+            </a:r>
+          </a:p>
+        </p:txBody>
+      </p:sp>
+      <p:sp>
+        <p:nvSpPr>
+          <p:cNvPr id="31" name="C2-E22 text 29" descr="sci-ppt:o029"/>
           <p:cNvSpPr txBox="1"/>
           <p:nvPr/>
         </p:nvSpPr>
         <p:spPr>
           <a:xfrm>
-            <a:off x="4998720" y="792480"/>
-            <a:ext cx="4267200" cy="359054"/>
+            <a:off x="6488582" y="4736592"/>
+            <a:ext cx="1470355" cy="216153"/>
           </a:xfrm>
           <a:prstGeom prst="rect">
             <a:avLst/>
@@ -3314,7 +4058,395 @@
           <a:effectLst/>
         </p:spPr>
         <p:txBody>
-          <a:bodyPr wrap="none" lIns="27432" rIns="27432" tIns="18288" bIns="18288" anchor="ctr">
+          <a:bodyPr wrap="none" lIns="18288" rIns="18288" tIns="18288" bIns="18288" anchor="t">
+            <a:spAutoFit/>
+          </a:bodyPr>
+          <a:lstStyle/>
+          <a:p>
+            <a:pPr algn="ctr">
+              <a:spcAft>
+                <a:spcPts val="0"/>
+              </a:spcAft>
+            </a:pPr>
+            <a:r>
+              <a:rPr sz="1100" b="0" i="0">
+                <a:solidFill>
+                  <a:srgbClr val="B4C7D2"/>
+                </a:solidFill>
+                <a:latin typeface="Arial"/>
+              </a:rPr>
+              <a:t>Q̇_b</a:t>
+            </a:r>
+          </a:p>
+        </p:txBody>
+      </p:sp>
+      <p:sp>
+        <p:nvSpPr>
+          <p:cNvPr id="32" name="C2-E22 rect 30" descr="sci-ppt:o030"/>
+          <p:cNvSpPr/>
+          <p:nvPr/>
+        </p:nvSpPr>
+        <p:spPr>
+          <a:xfrm>
+            <a:off x="8043062" y="2103119"/>
+            <a:ext cx="921715" cy="2011680"/>
+          </a:xfrm>
+          <a:prstGeom prst="rect">
+            <a:avLst/>
+          </a:prstGeom>
+          <a:solidFill>
+            <a:srgbClr val="8EDBD4">
+              <a:alpha val="85000"/>
+            </a:srgbClr>
+          </a:solidFill>
+          <a:ln w="12700">
+            <a:solidFill>
+              <a:srgbClr val="8EDBD4">
+                <a:alpha val="85000"/>
+              </a:srgbClr>
+            </a:solidFill>
+          </a:ln>
+          <a:effectLst/>
+        </p:spPr>
+        <p:txBody>
+          <a:bodyPr rtlCol="0" anchor="ctr"/>
+          <a:lstStyle/>
+          <a:p>
+            <a:pPr algn="ctr"/>
+          </a:p>
+        </p:txBody>
+      </p:sp>
+      <p:sp>
+        <p:nvSpPr>
+          <p:cNvPr id="33" name="C2-E22 text 31" descr="sci-ppt:o031"/>
+          <p:cNvSpPr txBox="1"/>
+          <p:nvPr/>
+        </p:nvSpPr>
+        <p:spPr>
+          <a:xfrm>
+            <a:off x="7814462" y="1828799"/>
+            <a:ext cx="1378915" cy="223900"/>
+          </a:xfrm>
+          <a:prstGeom prst="rect">
+            <a:avLst/>
+          </a:prstGeom>
+          <a:noFill/>
+          <a:effectLst/>
+        </p:spPr>
+        <p:txBody>
+          <a:bodyPr wrap="none" lIns="18288" rIns="18288" tIns="18288" bIns="18288" anchor="t">
+            <a:spAutoFit/>
+          </a:bodyPr>
+          <a:lstStyle/>
+          <a:p>
+            <a:pPr algn="ctr">
+              <a:spcAft>
+                <a:spcPts val="0"/>
+              </a:spcAft>
+            </a:pPr>
+            <a:r>
+              <a:rPr sz="1150" b="1" i="0">
+                <a:solidFill>
+                  <a:srgbClr val="E7F0F3"/>
+                </a:solidFill>
+                <a:latin typeface="Arial"/>
+              </a:rPr>
+              <a:t>+1.1</a:t>
+            </a:r>
+          </a:p>
+        </p:txBody>
+      </p:sp>
+      <p:sp>
+        <p:nvSpPr>
+          <p:cNvPr id="34" name="C2-E22 text 32" descr="sci-ppt:o032"/>
+          <p:cNvSpPr txBox="1"/>
+          <p:nvPr/>
+        </p:nvSpPr>
+        <p:spPr>
+          <a:xfrm>
+            <a:off x="7768742" y="4736592"/>
+            <a:ext cx="1470355" cy="216153"/>
+          </a:xfrm>
+          <a:prstGeom prst="rect">
+            <a:avLst/>
+          </a:prstGeom>
+          <a:noFill/>
+          <a:effectLst/>
+        </p:spPr>
+        <p:txBody>
+          <a:bodyPr wrap="none" lIns="18288" rIns="18288" tIns="18288" bIns="18288" anchor="t">
+            <a:spAutoFit/>
+          </a:bodyPr>
+          <a:lstStyle/>
+          <a:p>
+            <a:pPr algn="ctr">
+              <a:spcAft>
+                <a:spcPts val="0"/>
+              </a:spcAft>
+            </a:pPr>
+            <a:r>
+              <a:rPr sz="1100" b="0" i="0">
+                <a:solidFill>
+                  <a:srgbClr val="B4C7D2"/>
+                </a:solidFill>
+                <a:latin typeface="Arial"/>
+              </a:rPr>
+              <a:t>Σ h ṁ</a:t>
+            </a:r>
+          </a:p>
+        </p:txBody>
+      </p:sp>
+      <p:sp>
+        <p:nvSpPr>
+          <p:cNvPr id="35" name="C2-E22 rect 33" descr="sci-ppt:o033"/>
+          <p:cNvSpPr/>
+          <p:nvPr/>
+        </p:nvSpPr>
+        <p:spPr>
+          <a:xfrm>
+            <a:off x="9323222" y="2103119"/>
+            <a:ext cx="921715" cy="1645920"/>
+          </a:xfrm>
+          <a:prstGeom prst="rect">
+            <a:avLst/>
+          </a:prstGeom>
+          <a:solidFill>
+            <a:srgbClr val="F2B880">
+              <a:alpha val="85000"/>
+            </a:srgbClr>
+          </a:solidFill>
+          <a:ln w="12700">
+            <a:solidFill>
+              <a:srgbClr val="F2B880">
+                <a:alpha val="85000"/>
+              </a:srgbClr>
+            </a:solidFill>
+          </a:ln>
+          <a:effectLst/>
+        </p:spPr>
+        <p:txBody>
+          <a:bodyPr rtlCol="0" anchor="ctr"/>
+          <a:lstStyle/>
+          <a:p>
+            <a:pPr algn="ctr"/>
+          </a:p>
+        </p:txBody>
+      </p:sp>
+      <p:sp>
+        <p:nvSpPr>
+          <p:cNvPr id="36" name="C2-E22 text 34" descr="sci-ppt:o034"/>
+          <p:cNvSpPr txBox="1"/>
+          <p:nvPr/>
+        </p:nvSpPr>
+        <p:spPr>
+          <a:xfrm>
+            <a:off x="9094622" y="1828799"/>
+            <a:ext cx="1378915" cy="223900"/>
+          </a:xfrm>
+          <a:prstGeom prst="rect">
+            <a:avLst/>
+          </a:prstGeom>
+          <a:noFill/>
+          <a:effectLst/>
+        </p:spPr>
+        <p:txBody>
+          <a:bodyPr wrap="none" lIns="18288" rIns="18288" tIns="18288" bIns="18288" anchor="t">
+            <a:spAutoFit/>
+          </a:bodyPr>
+          <a:lstStyle/>
+          <a:p>
+            <a:pPr algn="ctr">
+              <a:spcAft>
+                <a:spcPts val="0"/>
+              </a:spcAft>
+            </a:pPr>
+            <a:r>
+              <a:rPr sz="1150" b="1" i="0">
+                <a:solidFill>
+                  <a:srgbClr val="E7F0F3"/>
+                </a:solidFill>
+                <a:latin typeface="Arial"/>
+              </a:rPr>
+              <a:t>-0.9</a:t>
+            </a:r>
+          </a:p>
+        </p:txBody>
+      </p:sp>
+      <p:sp>
+        <p:nvSpPr>
+          <p:cNvPr id="37" name="C2-E22 text 35" descr="sci-ppt:o035"/>
+          <p:cNvSpPr txBox="1"/>
+          <p:nvPr/>
+        </p:nvSpPr>
+        <p:spPr>
+          <a:xfrm>
+            <a:off x="9048902" y="4736592"/>
+            <a:ext cx="1470355" cy="216153"/>
+          </a:xfrm>
+          <a:prstGeom prst="rect">
+            <a:avLst/>
+          </a:prstGeom>
+          <a:noFill/>
+          <a:effectLst/>
+        </p:spPr>
+        <p:txBody>
+          <a:bodyPr wrap="none" lIns="18288" rIns="18288" tIns="18288" bIns="18288" anchor="t">
+            <a:spAutoFit/>
+          </a:bodyPr>
+          <a:lstStyle/>
+          <a:p>
+            <a:pPr algn="ctr">
+              <a:spcAft>
+                <a:spcPts val="0"/>
+              </a:spcAft>
+            </a:pPr>
+            <a:r>
+              <a:rPr sz="1100" b="0" i="0">
+                <a:solidFill>
+                  <a:srgbClr val="B4C7D2"/>
+                </a:solidFill>
+                <a:latin typeface="Arial"/>
+              </a:rPr>
+              <a:t>−p_b V̇_b</a:t>
+            </a:r>
+          </a:p>
+        </p:txBody>
+      </p:sp>
+      <p:sp>
+        <p:nvSpPr>
+          <p:cNvPr id="38" name="C2-E22 rect 36" descr="sci-ppt:o036"/>
+          <p:cNvSpPr/>
+          <p:nvPr/>
+        </p:nvSpPr>
+        <p:spPr>
+          <a:xfrm>
+            <a:off x="10603382" y="3749039"/>
+            <a:ext cx="921715" cy="914400"/>
+          </a:xfrm>
+          <a:prstGeom prst="rect">
+            <a:avLst/>
+          </a:prstGeom>
+          <a:solidFill>
+            <a:srgbClr val="7FC8F8">
+              <a:alpha val="85000"/>
+            </a:srgbClr>
+          </a:solidFill>
+          <a:ln w="12700">
+            <a:solidFill>
+              <a:srgbClr val="7FC8F8">
+                <a:alpha val="85000"/>
+              </a:srgbClr>
+            </a:solidFill>
+          </a:ln>
+          <a:effectLst/>
+        </p:spPr>
+        <p:txBody>
+          <a:bodyPr rtlCol="0" anchor="ctr"/>
+          <a:lstStyle/>
+          <a:p>
+            <a:pPr algn="ctr"/>
+          </a:p>
+        </p:txBody>
+      </p:sp>
+      <p:sp>
+        <p:nvSpPr>
+          <p:cNvPr id="39" name="C2-E22 text 37" descr="sci-ppt:o037"/>
+          <p:cNvSpPr txBox="1"/>
+          <p:nvPr/>
+        </p:nvSpPr>
+        <p:spPr>
+          <a:xfrm>
+            <a:off x="10374782" y="3474720"/>
+            <a:ext cx="1378915" cy="223900"/>
+          </a:xfrm>
+          <a:prstGeom prst="rect">
+            <a:avLst/>
+          </a:prstGeom>
+          <a:noFill/>
+          <a:effectLst/>
+        </p:spPr>
+        <p:txBody>
+          <a:bodyPr wrap="none" lIns="18288" rIns="18288" tIns="18288" bIns="18288" anchor="t">
+            <a:spAutoFit/>
+          </a:bodyPr>
+          <a:lstStyle/>
+          <a:p>
+            <a:pPr algn="ctr">
+              <a:spcAft>
+                <a:spcPts val="0"/>
+              </a:spcAft>
+            </a:pPr>
+            <a:r>
+              <a:rPr sz="1150" b="1" i="0">
+                <a:solidFill>
+                  <a:srgbClr val="E7F0F3"/>
+                </a:solidFill>
+                <a:latin typeface="Arial"/>
+              </a:rPr>
+              <a:t>0.5</a:t>
+            </a:r>
+          </a:p>
+        </p:txBody>
+      </p:sp>
+      <p:sp>
+        <p:nvSpPr>
+          <p:cNvPr id="40" name="C2-E22 text 38" descr="sci-ppt:o038"/>
+          <p:cNvSpPr txBox="1"/>
+          <p:nvPr/>
+        </p:nvSpPr>
+        <p:spPr>
+          <a:xfrm>
+            <a:off x="10329062" y="4736592"/>
+            <a:ext cx="1470355" cy="216153"/>
+          </a:xfrm>
+          <a:prstGeom prst="rect">
+            <a:avLst/>
+          </a:prstGeom>
+          <a:noFill/>
+          <a:effectLst/>
+        </p:spPr>
+        <p:txBody>
+          <a:bodyPr wrap="none" lIns="18288" rIns="18288" tIns="18288" bIns="18288" anchor="t">
+            <a:spAutoFit/>
+          </a:bodyPr>
+          <a:lstStyle/>
+          <a:p>
+            <a:pPr algn="ctr">
+              <a:spcAft>
+                <a:spcPts val="0"/>
+              </a:spcAft>
+            </a:pPr>
+            <a:r>
+              <a:rPr sz="1100" b="0" i="0">
+                <a:solidFill>
+                  <a:srgbClr val="B4C7D2"/>
+                </a:solidFill>
+                <a:latin typeface="Arial"/>
+              </a:rPr>
+              <a:t>= U̇_b</a:t>
+            </a:r>
+          </a:p>
+        </p:txBody>
+      </p:sp>
+      <p:sp>
+        <p:nvSpPr>
+          <p:cNvPr id="41" name="C2-E22 text 39" descr="sci-ppt:o039"/>
+          <p:cNvSpPr txBox="1"/>
+          <p:nvPr/>
+        </p:nvSpPr>
+        <p:spPr>
+          <a:xfrm>
+            <a:off x="6492240" y="5349240"/>
+            <a:ext cx="5303520" cy="417576"/>
+          </a:xfrm>
+          <a:prstGeom prst="rect">
+            <a:avLst/>
+          </a:prstGeom>
+          <a:noFill/>
+          <a:effectLst/>
+        </p:spPr>
+        <p:txBody>
+          <a:bodyPr wrap="none" lIns="18288" rIns="18288" tIns="18288" bIns="18288" anchor="t">
             <a:spAutoFit/>
           </a:bodyPr>
           <a:lstStyle/>
@@ -3325,51 +4457,43 @@
               </a:spcAft>
             </a:pPr>
             <a:r>
-              <a:rPr sz="1823" b="0" i="0">
+              <a:rPr sz="1200" b="0" i="0">
                 <a:solidFill>
                   <a:srgbClr val="E7F0F3"/>
                 </a:solidFill>
                 <a:latin typeface="Arial"/>
               </a:rPr>
-              <a:t>Mass enthalpy entry</a:t>
-            </a:r>
-          </a:p>
-        </p:txBody>
-      </p:sp>
-      <p:cxnSp>
-        <p:nvCxnSpPr>
-          <p:cNvPr id="9" name="arrow8" descr="sci-ppt:C2-E22-008"/>
-          <p:cNvCxnSpPr/>
-          <p:nvPr/>
-        </p:nvCxnSpPr>
-        <p:spPr>
-          <a:xfrm>
-            <a:off x="7802880" y="2621280"/>
-            <a:ext cx="2682240" cy="0"/>
-          </a:xfrm>
-          <a:prstGeom prst="line">
-            <a:avLst/>
-          </a:prstGeom>
-          <a:ln w="25400">
-            <a:solidFill>
-              <a:srgbClr val="8EDBD4"/>
-            </a:solidFill>
-            <a:headEnd type="none" w="med" len="med"/>
-            <a:tailEnd type="triangle" w="med" len="med"/>
-          </a:ln>
-          <a:effectLst/>
-        </p:spPr>
-      </p:cxnSp>
-      <p:sp>
-        <p:nvSpPr>
-          <p:cNvPr id="10" name="text9" descr="sci-ppt:C2-E22-009"/>
+              <a:t>U̇_b = Q̇_b − p_b V̇_b + Σ hᵥ,s ṁᵥ,s. Transported enthalpy and</a:t>
+            </a:r>
+          </a:p>
+          <a:p>
+            <a:pPr algn="l">
+              <a:spcAft>
+                <a:spcPts val="0"/>
+              </a:spcAft>
+            </a:pPr>
+            <a:r>
+              <a:rPr sz="1200" b="0" i="0">
+                <a:solidFill>
+                  <a:srgbClr val="E7F0F3"/>
+                </a:solidFill>
+                <a:latin typeface="Arial"/>
+              </a:rPr>
+              <a:t>conduction are different terms.</a:t>
+            </a:r>
+          </a:p>
+        </p:txBody>
+      </p:sp>
+      <p:sp>
+        <p:nvSpPr>
+          <p:cNvPr id="42" name="C2-E22 text 40" descr="sci-ppt:o040"/>
           <p:cNvSpPr txBox="1"/>
           <p:nvPr/>
         </p:nvSpPr>
         <p:spPr>
           <a:xfrm>
-            <a:off x="8412480" y="1767840"/>
-            <a:ext cx="3291840" cy="359054"/>
+            <a:off x="320040" y="6510528"/>
+            <a:ext cx="11521440" cy="200660"/>
           </a:xfrm>
           <a:prstGeom prst="rect">
             <a:avLst/>
@@ -3378,7 +4502,7 @@
           <a:effectLst/>
         </p:spPr>
         <p:txBody>
-          <a:bodyPr wrap="none" lIns="27432" rIns="27432" tIns="18288" bIns="18288" anchor="ctr">
+          <a:bodyPr wrap="none" lIns="18288" rIns="18288" tIns="18288" bIns="18288" anchor="t">
             <a:spAutoFit/>
           </a:bodyPr>
           <a:lstStyle/>
@@ -3389,413 +4513,13 @@
               </a:spcAft>
             </a:pPr>
             <a:r>
-              <a:rPr sz="1823" b="0" i="0">
-                <a:solidFill>
-                  <a:srgbClr val="E7F0F3"/>
-                </a:solidFill>
-                <a:latin typeface="Arial"/>
-              </a:rPr>
-              <a:t>Work p_b V̇_b</a:t>
-            </a:r>
-          </a:p>
-        </p:txBody>
-      </p:sp>
-      <p:sp>
-        <p:nvSpPr>
-          <p:cNvPr id="11" name="text10" descr="sci-ppt:C2-E22-010"/>
-          <p:cNvSpPr txBox="1"/>
-          <p:nvPr/>
-        </p:nvSpPr>
-        <p:spPr>
-          <a:xfrm>
-            <a:off x="1341120" y="4084320"/>
-            <a:ext cx="9997440" cy="340156"/>
-          </a:xfrm>
-          <a:prstGeom prst="rect">
-            <a:avLst/>
-          </a:prstGeom>
-          <a:noFill/>
-          <a:effectLst/>
-        </p:spPr>
-        <p:txBody>
-          <a:bodyPr wrap="none" lIns="27432" rIns="27432" tIns="18288" bIns="18288" anchor="ctr">
-            <a:spAutoFit/>
-          </a:bodyPr>
-          <a:lstStyle/>
-          <a:p>
-            <a:pPr algn="l">
-              <a:spcAft>
-                <a:spcPts val="0"/>
-              </a:spcAft>
-            </a:pPr>
-            <a:r>
-              <a:rPr sz="1728" b="0" i="0">
-                <a:solidFill>
-                  <a:srgbClr val="E7F0F3"/>
-                </a:solidFill>
-                <a:latin typeface="Arial"/>
-              </a:rPr>
-              <a:t>Conductive heat and transported enthalpy are separate terms.</a:t>
-            </a:r>
-          </a:p>
-        </p:txBody>
-      </p:sp>
-      <p:sp>
-        <p:nvSpPr>
-          <p:cNvPr id="12" name="text11" descr="sci-ppt:C2-E22-011"/>
-          <p:cNvSpPr txBox="1"/>
-          <p:nvPr/>
-        </p:nvSpPr>
-        <p:spPr>
-          <a:xfrm>
-            <a:off x="365760" y="4974336"/>
-            <a:ext cx="5547360" cy="321259"/>
-          </a:xfrm>
-          <a:prstGeom prst="rect">
-            <a:avLst/>
-          </a:prstGeom>
-          <a:noFill/>
-          <a:effectLst/>
-        </p:spPr>
-        <p:txBody>
-          <a:bodyPr wrap="none" lIns="27432" rIns="27432" tIns="18288" bIns="18288" anchor="ctr">
-            <a:spAutoFit/>
-          </a:bodyPr>
-          <a:lstStyle/>
-          <a:p>
-            <a:pPr algn="l">
-              <a:spcAft>
-                <a:spcPts val="0"/>
-              </a:spcAft>
-            </a:pPr>
-            <a:r>
-              <a:rPr sz="1632" b="0" i="0">
-                <a:solidFill>
-                  <a:srgbClr val="E7F0F3"/>
-                </a:solidFill>
-                <a:latin typeface="Arial"/>
-              </a:rPr>
-              <a:t>U_b: vapor energy storage</a:t>
-            </a:r>
-          </a:p>
-        </p:txBody>
-      </p:sp>
-      <p:sp>
-        <p:nvSpPr>
-          <p:cNvPr id="13" name="text12" descr="sci-ppt:C2-E22-012"/>
-          <p:cNvSpPr txBox="1"/>
-          <p:nvPr/>
-        </p:nvSpPr>
-        <p:spPr>
-          <a:xfrm>
-            <a:off x="365760" y="5266944"/>
-            <a:ext cx="5547360" cy="321259"/>
-          </a:xfrm>
-          <a:prstGeom prst="rect">
-            <a:avLst/>
-          </a:prstGeom>
-          <a:noFill/>
-          <a:effectLst/>
-        </p:spPr>
-        <p:txBody>
-          <a:bodyPr wrap="none" lIns="27432" rIns="27432" tIns="18288" bIns="18288" anchor="ctr">
-            <a:spAutoFit/>
-          </a:bodyPr>
-          <a:lstStyle/>
-          <a:p>
-            <a:pPr algn="l">
-              <a:spcAft>
-                <a:spcPts val="0"/>
-              </a:spcAft>
-            </a:pPr>
-            <a:r>
-              <a:rPr sz="1632" b="0" i="0">
-                <a:solidFill>
-                  <a:srgbClr val="E7F0F3"/>
-                </a:solidFill>
-                <a:latin typeface="Arial"/>
-              </a:rPr>
-              <a:t>p_b, V_b, V̇_b: pressure work</a:t>
-            </a:r>
-          </a:p>
-        </p:txBody>
-      </p:sp>
-      <p:sp>
-        <p:nvSpPr>
-          <p:cNvPr id="14" name="text13" descr="sci-ppt:C2-E22-013"/>
-          <p:cNvSpPr txBox="1"/>
-          <p:nvPr/>
-        </p:nvSpPr>
-        <p:spPr>
-          <a:xfrm>
-            <a:off x="365760" y="5559552"/>
-            <a:ext cx="5547360" cy="321259"/>
-          </a:xfrm>
-          <a:prstGeom prst="rect">
-            <a:avLst/>
-          </a:prstGeom>
-          <a:noFill/>
-          <a:effectLst/>
-        </p:spPr>
-        <p:txBody>
-          <a:bodyPr wrap="none" lIns="27432" rIns="27432" tIns="18288" bIns="18288" anchor="ctr">
-            <a:spAutoFit/>
-          </a:bodyPr>
-          <a:lstStyle/>
-          <a:p>
-            <a:pPr algn="l">
-              <a:spcAft>
-                <a:spcPts val="0"/>
-              </a:spcAft>
-            </a:pPr>
-            <a:r>
-              <a:rPr sz="1632" b="0" i="0">
-                <a:solidFill>
-                  <a:srgbClr val="E7F0F3"/>
-                </a:solidFill>
-                <a:latin typeface="Arial"/>
-              </a:rPr>
-              <a:t>h_v,s, ṁ_v,s: mass enthalpy entry</a:t>
-            </a:r>
-          </a:p>
-        </p:txBody>
-      </p:sp>
-      <p:sp>
-        <p:nvSpPr>
-          <p:cNvPr id="15" name="text14" descr="sci-ppt:C2-E22-014"/>
-          <p:cNvSpPr txBox="1"/>
-          <p:nvPr/>
-        </p:nvSpPr>
-        <p:spPr>
-          <a:xfrm>
-            <a:off x="365760" y="5852160"/>
-            <a:ext cx="5547360" cy="321259"/>
-          </a:xfrm>
-          <a:prstGeom prst="rect">
-            <a:avLst/>
-          </a:prstGeom>
-          <a:noFill/>
-          <a:effectLst/>
-        </p:spPr>
-        <p:txBody>
-          <a:bodyPr wrap="none" lIns="27432" rIns="27432" tIns="18288" bIns="18288" anchor="ctr">
-            <a:spAutoFit/>
-          </a:bodyPr>
-          <a:lstStyle/>
-          <a:p>
-            <a:pPr algn="l">
-              <a:spcAft>
-                <a:spcPts val="0"/>
-              </a:spcAft>
-            </a:pPr>
-            <a:r>
-              <a:rPr sz="1632" b="0" i="0">
-                <a:solidFill>
-                  <a:srgbClr val="E7F0F3"/>
-                </a:solidFill>
-                <a:latin typeface="Arial"/>
-              </a:rPr>
-              <a:t>π: spherical volume</a:t>
-            </a:r>
-          </a:p>
-        </p:txBody>
-      </p:sp>
-      <p:sp>
-        <p:nvSpPr>
-          <p:cNvPr id="16" name="text15" descr="sci-ppt:C2-E22-015"/>
-          <p:cNvSpPr txBox="1"/>
-          <p:nvPr/>
-        </p:nvSpPr>
-        <p:spPr>
-          <a:xfrm>
-            <a:off x="6156960" y="4974336"/>
-            <a:ext cx="5547360" cy="321259"/>
-          </a:xfrm>
-          <a:prstGeom prst="rect">
-            <a:avLst/>
-          </a:prstGeom>
-          <a:noFill/>
-          <a:effectLst/>
-        </p:spPr>
-        <p:txBody>
-          <a:bodyPr wrap="none" lIns="27432" rIns="27432" tIns="18288" bIns="18288" anchor="ctr">
-            <a:spAutoFit/>
-          </a:bodyPr>
-          <a:lstStyle/>
-          <a:p>
-            <a:pPr algn="l">
-              <a:spcAft>
-                <a:spcPts val="0"/>
-              </a:spcAft>
-            </a:pPr>
-            <a:r>
-              <a:rPr sz="1632" b="0" i="0">
-                <a:solidFill>
-                  <a:srgbClr val="E7F0F3"/>
-                </a:solidFill>
-                <a:latin typeface="Arial"/>
-              </a:rPr>
-              <a:t>Q̇_b: conductive heat only</a:t>
-            </a:r>
-          </a:p>
-        </p:txBody>
-      </p:sp>
-      <p:sp>
-        <p:nvSpPr>
-          <p:cNvPr id="17" name="text16" descr="sci-ppt:C2-E22-016"/>
-          <p:cNvSpPr txBox="1"/>
-          <p:nvPr/>
-        </p:nvSpPr>
-        <p:spPr>
-          <a:xfrm>
-            <a:off x="6156960" y="5266944"/>
-            <a:ext cx="5547360" cy="321259"/>
-          </a:xfrm>
-          <a:prstGeom prst="rect">
-            <a:avLst/>
-          </a:prstGeom>
-          <a:noFill/>
-          <a:effectLst/>
-        </p:spPr>
-        <p:txBody>
-          <a:bodyPr wrap="none" lIns="27432" rIns="27432" tIns="18288" bIns="18288" anchor="ctr">
-            <a:spAutoFit/>
-          </a:bodyPr>
-          <a:lstStyle/>
-          <a:p>
-            <a:pPr algn="l">
-              <a:spcAft>
-                <a:spcPts val="0"/>
-              </a:spcAft>
-            </a:pPr>
-            <a:r>
-              <a:rPr sz="1632" b="0" i="0">
-                <a:solidFill>
-                  <a:srgbClr val="E7F0F3"/>
-                </a:solidFill>
-                <a:latin typeface="Arial"/>
-              </a:rPr>
-              <a:t>R, Ṙ: bubble geometry and speed</a:t>
-            </a:r>
-          </a:p>
-        </p:txBody>
-      </p:sp>
-      <p:sp>
-        <p:nvSpPr>
-          <p:cNvPr id="18" name="text17" descr="sci-ppt:C2-E22-017"/>
-          <p:cNvSpPr txBox="1"/>
-          <p:nvPr/>
-        </p:nvSpPr>
-        <p:spPr>
-          <a:xfrm>
-            <a:off x="6156960" y="5559552"/>
-            <a:ext cx="5547360" cy="321259"/>
-          </a:xfrm>
-          <a:prstGeom prst="rect">
-            <a:avLst/>
-          </a:prstGeom>
-          <a:noFill/>
-          <a:effectLst/>
-        </p:spPr>
-        <p:txBody>
-          <a:bodyPr wrap="none" lIns="27432" rIns="27432" tIns="18288" bIns="18288" anchor="ctr">
-            <a:spAutoFit/>
-          </a:bodyPr>
-          <a:lstStyle/>
-          <a:p>
-            <a:pPr algn="l">
-              <a:spcAft>
-                <a:spcPts val="0"/>
-              </a:spcAft>
-            </a:pPr>
-            <a:r>
-              <a:rPr sz="1632" b="0" i="0">
-                <a:solidFill>
-                  <a:srgbClr val="E7F0F3"/>
-                </a:solidFill>
-                <a:latin typeface="Arial"/>
-              </a:rPr>
-              <a:t>s = 1…N_s: species ledger</a:t>
-            </a:r>
-          </a:p>
-        </p:txBody>
-      </p:sp>
-      <p:sp>
-        <p:nvSpPr>
-          <p:cNvPr id="19" name="text18" descr="sci-ppt:C2-E22-018"/>
-          <p:cNvSpPr txBox="1"/>
-          <p:nvPr/>
-        </p:nvSpPr>
-        <p:spPr>
-          <a:xfrm>
-            <a:off x="365760" y="6339840"/>
-            <a:ext cx="11277600" cy="302361"/>
-          </a:xfrm>
-          <a:prstGeom prst="rect">
-            <a:avLst/>
-          </a:prstGeom>
-          <a:noFill/>
-          <a:effectLst/>
-        </p:spPr>
-        <p:txBody>
-          <a:bodyPr wrap="none" lIns="27432" rIns="27432" tIns="18288" bIns="18288" anchor="ctr">
-            <a:spAutoFit/>
-          </a:bodyPr>
-          <a:lstStyle/>
-          <a:p>
-            <a:pPr algn="l">
-              <a:spcAft>
-                <a:spcPts val="0"/>
-              </a:spcAft>
-            </a:pPr>
-            <a:r>
-              <a:rPr sz="1536" b="0" i="0">
+              <a:rPr sz="1000" b="0" i="0">
                 <a:solidFill>
                   <a:srgbClr val="B4C7D2"/>
                 </a:solidFill>
                 <a:latin typeface="Arial"/>
               </a:rPr>
-              <a:t>Expansion removes energy through p_b V̇_b</a:t>
-            </a:r>
-          </a:p>
-        </p:txBody>
-      </p:sp>
-      <p:sp>
-        <p:nvSpPr>
-          <p:cNvPr id="20" name="text19" descr="sci-ppt:C2-E22-019"/>
-          <p:cNvSpPr txBox="1"/>
-          <p:nvPr/>
-        </p:nvSpPr>
-        <p:spPr>
-          <a:xfrm>
-            <a:off x="365760" y="6632448"/>
-            <a:ext cx="11277600" cy="302361"/>
-          </a:xfrm>
-          <a:prstGeom prst="rect">
-            <a:avLst/>
-          </a:prstGeom>
-          <a:noFill/>
-          <a:effectLst/>
-        </p:spPr>
-        <p:txBody>
-          <a:bodyPr wrap="none" lIns="27432" rIns="27432" tIns="18288" bIns="18288" anchor="ctr">
-            <a:spAutoFit/>
-          </a:bodyPr>
-          <a:lstStyle/>
-          <a:p>
-            <a:pPr algn="l">
-              <a:spcAft>
-                <a:spcPts val="0"/>
-              </a:spcAft>
-            </a:pPr>
-            <a:r>
-              <a:rPr sz="1536" b="0" i="0">
-                <a:solidFill>
-                  <a:srgbClr val="B4C7D2"/>
-                </a:solidFill>
-                <a:latin typeface="Arial"/>
-              </a:rPr>
-              <a:t>Do not add a second latent-heat source to transported vapor enthalpy</a:t>
+              <a:t>First law of Eq. C2-E22; the numbers in the ledger are illustrative.</a:t>
             </a:r>
           </a:p>
         </p:txBody>
